--- a/願.pptx
+++ b/願.pptx
@@ -5,8 +5,11 @@
     <p:sldMasterId id="2147483660" r:id="rId1"/>
   </p:sldMasterIdLst>
   <p:sldIdLst>
-    <p:sldId id="257" r:id="rId2"/>
-    <p:sldId id="258" r:id="rId3"/>
+    <p:sldId id="260" r:id="rId2"/>
+    <p:sldId id="261" r:id="rId3"/>
+    <p:sldId id="262" r:id="rId4"/>
+    <p:sldId id="263" r:id="rId5"/>
+    <p:sldId id="264" r:id="rId6"/>
   </p:sldIdLst>
   <p:sldSz cx="12192000" cy="6858000"/>
   <p:notesSz cx="6858000" cy="9144000"/>
@@ -105,6 +108,11 @@
       </a:defRPr>
     </a:lvl9pPr>
   </p:defaultTextStyle>
+  <p:extLst>
+    <p:ext uri="{EFAFB233-063F-42B5-8137-9DF3F51BA10A}">
+      <p15:sldGuideLst xmlns:p15="http://schemas.microsoft.com/office/powerpoint/2012/main"/>
+    </p:ext>
+  </p:extLst>
 </p:presentation>
 </file>
 
@@ -146,7 +154,7 @@
           <a:lstStyle/>
           <a:p>
             <a:r>
-              <a:rPr lang="en-US" altLang="zh-TW" smtClean="0"/>
+              <a:rPr lang="en-US" altLang="zh-TW"/>
               <a:t>Click to edit Master title style</a:t>
             </a:r>
             <a:endParaRPr lang="zh-TW" altLang="en-US"/>
@@ -265,7 +273,7 @@
           </a:lstStyle>
           <a:p>
             <a:r>
-              <a:rPr lang="en-US" altLang="zh-TW" smtClean="0"/>
+              <a:rPr lang="en-US" altLang="zh-TW"/>
               <a:t>Click to edit Master subtitle style</a:t>
             </a:r>
             <a:endParaRPr lang="zh-TW" altLang="en-US"/>
@@ -289,7 +297,7 @@
           <a:p>
             <a:fld id="{CE74E66C-91F5-4692-A697-2FF5E9EDBD98}" type="datetimeFigureOut">
               <a:rPr lang="vi-VN" smtClean="0"/>
-              <a:t>14/03/2020</a:t>
+              <a:t>30/05/2024</a:t>
             </a:fld>
             <a:endParaRPr lang="vi-VN"/>
           </a:p>
@@ -383,7 +391,7 @@
           <a:lstStyle/>
           <a:p>
             <a:r>
-              <a:rPr lang="en-US" altLang="zh-TW" smtClean="0"/>
+              <a:rPr lang="en-US" altLang="zh-TW"/>
               <a:t>Click to edit Master title style</a:t>
             </a:r>
             <a:endParaRPr lang="zh-TW" altLang="en-US"/>
@@ -407,35 +415,35 @@
           <a:p>
             <a:pPr lvl="0"/>
             <a:r>
-              <a:rPr lang="en-US" altLang="zh-TW" smtClean="0"/>
+              <a:rPr lang="en-US" altLang="zh-TW"/>
               <a:t>Edit Master text styles</a:t>
             </a:r>
           </a:p>
           <a:p>
             <a:pPr lvl="1"/>
             <a:r>
-              <a:rPr lang="en-US" altLang="zh-TW" smtClean="0"/>
+              <a:rPr lang="en-US" altLang="zh-TW"/>
               <a:t>Second level</a:t>
             </a:r>
           </a:p>
           <a:p>
             <a:pPr lvl="2"/>
             <a:r>
-              <a:rPr lang="en-US" altLang="zh-TW" smtClean="0"/>
+              <a:rPr lang="en-US" altLang="zh-TW"/>
               <a:t>Third level</a:t>
             </a:r>
           </a:p>
           <a:p>
             <a:pPr lvl="3"/>
             <a:r>
-              <a:rPr lang="en-US" altLang="zh-TW" smtClean="0"/>
+              <a:rPr lang="en-US" altLang="zh-TW"/>
               <a:t>Fourth level</a:t>
             </a:r>
           </a:p>
           <a:p>
             <a:pPr lvl="4"/>
             <a:r>
-              <a:rPr lang="en-US" altLang="zh-TW" smtClean="0"/>
+              <a:rPr lang="en-US" altLang="zh-TW"/>
               <a:t>Fifth level</a:t>
             </a:r>
             <a:endParaRPr lang="zh-TW" altLang="en-US"/>
@@ -459,7 +467,7 @@
           <a:p>
             <a:fld id="{CE74E66C-91F5-4692-A697-2FF5E9EDBD98}" type="datetimeFigureOut">
               <a:rPr lang="vi-VN" smtClean="0"/>
-              <a:t>14/03/2020</a:t>
+              <a:t>30/05/2024</a:t>
             </a:fld>
             <a:endParaRPr lang="vi-VN"/>
           </a:p>
@@ -558,7 +566,7 @@
           <a:lstStyle/>
           <a:p>
             <a:r>
-              <a:rPr lang="en-US" altLang="zh-TW" smtClean="0"/>
+              <a:rPr lang="en-US" altLang="zh-TW"/>
               <a:t>Click to edit Master title style</a:t>
             </a:r>
             <a:endParaRPr lang="zh-TW" altLang="en-US"/>
@@ -587,35 +595,35 @@
           <a:p>
             <a:pPr lvl="0"/>
             <a:r>
-              <a:rPr lang="en-US" altLang="zh-TW" smtClean="0"/>
+              <a:rPr lang="en-US" altLang="zh-TW"/>
               <a:t>Edit Master text styles</a:t>
             </a:r>
           </a:p>
           <a:p>
             <a:pPr lvl="1"/>
             <a:r>
-              <a:rPr lang="en-US" altLang="zh-TW" smtClean="0"/>
+              <a:rPr lang="en-US" altLang="zh-TW"/>
               <a:t>Second level</a:t>
             </a:r>
           </a:p>
           <a:p>
             <a:pPr lvl="2"/>
             <a:r>
-              <a:rPr lang="en-US" altLang="zh-TW" smtClean="0"/>
+              <a:rPr lang="en-US" altLang="zh-TW"/>
               <a:t>Third level</a:t>
             </a:r>
           </a:p>
           <a:p>
             <a:pPr lvl="3"/>
             <a:r>
-              <a:rPr lang="en-US" altLang="zh-TW" smtClean="0"/>
+              <a:rPr lang="en-US" altLang="zh-TW"/>
               <a:t>Fourth level</a:t>
             </a:r>
           </a:p>
           <a:p>
             <a:pPr lvl="4"/>
             <a:r>
-              <a:rPr lang="en-US" altLang="zh-TW" smtClean="0"/>
+              <a:rPr lang="en-US" altLang="zh-TW"/>
               <a:t>Fifth level</a:t>
             </a:r>
             <a:endParaRPr lang="zh-TW" altLang="en-US"/>
@@ -639,7 +647,7 @@
           <a:p>
             <a:fld id="{CE74E66C-91F5-4692-A697-2FF5E9EDBD98}" type="datetimeFigureOut">
               <a:rPr lang="vi-VN" smtClean="0"/>
-              <a:t>14/03/2020</a:t>
+              <a:t>30/05/2024</a:t>
             </a:fld>
             <a:endParaRPr lang="vi-VN"/>
           </a:p>
@@ -733,7 +741,7 @@
           <a:lstStyle/>
           <a:p>
             <a:r>
-              <a:rPr lang="en-US" altLang="zh-TW" smtClean="0"/>
+              <a:rPr lang="en-US" altLang="zh-TW"/>
               <a:t>Click to edit Master title style</a:t>
             </a:r>
             <a:endParaRPr lang="zh-TW" altLang="en-US"/>
@@ -757,35 +765,35 @@
           <a:p>
             <a:pPr lvl="0"/>
             <a:r>
-              <a:rPr lang="en-US" altLang="zh-TW" smtClean="0"/>
+              <a:rPr lang="en-US" altLang="zh-TW"/>
               <a:t>Edit Master text styles</a:t>
             </a:r>
           </a:p>
           <a:p>
             <a:pPr lvl="1"/>
             <a:r>
-              <a:rPr lang="en-US" altLang="zh-TW" smtClean="0"/>
+              <a:rPr lang="en-US" altLang="zh-TW"/>
               <a:t>Second level</a:t>
             </a:r>
           </a:p>
           <a:p>
             <a:pPr lvl="2"/>
             <a:r>
-              <a:rPr lang="en-US" altLang="zh-TW" smtClean="0"/>
+              <a:rPr lang="en-US" altLang="zh-TW"/>
               <a:t>Third level</a:t>
             </a:r>
           </a:p>
           <a:p>
             <a:pPr lvl="3"/>
             <a:r>
-              <a:rPr lang="en-US" altLang="zh-TW" smtClean="0"/>
+              <a:rPr lang="en-US" altLang="zh-TW"/>
               <a:t>Fourth level</a:t>
             </a:r>
           </a:p>
           <a:p>
             <a:pPr lvl="4"/>
             <a:r>
-              <a:rPr lang="en-US" altLang="zh-TW" smtClean="0"/>
+              <a:rPr lang="en-US" altLang="zh-TW"/>
               <a:t>Fifth level</a:t>
             </a:r>
             <a:endParaRPr lang="zh-TW" altLang="en-US"/>
@@ -809,7 +817,7 @@
           <a:p>
             <a:fld id="{CE74E66C-91F5-4692-A697-2FF5E9EDBD98}" type="datetimeFigureOut">
               <a:rPr lang="vi-VN" smtClean="0"/>
-              <a:t>14/03/2020</a:t>
+              <a:t>30/05/2024</a:t>
             </a:fld>
             <a:endParaRPr lang="vi-VN"/>
           </a:p>
@@ -912,7 +920,7 @@
           </a:lstStyle>
           <a:p>
             <a:r>
-              <a:rPr lang="en-US" altLang="zh-TW" smtClean="0"/>
+              <a:rPr lang="en-US" altLang="zh-TW"/>
               <a:t>Click to edit Master title style</a:t>
             </a:r>
             <a:endParaRPr lang="zh-TW" altLang="en-US"/>
@@ -1032,7 +1040,7 @@
           <a:p>
             <a:pPr lvl="0"/>
             <a:r>
-              <a:rPr lang="en-US" altLang="zh-TW" smtClean="0"/>
+              <a:rPr lang="en-US" altLang="zh-TW"/>
               <a:t>Edit Master text styles</a:t>
             </a:r>
           </a:p>
@@ -1055,7 +1063,7 @@
           <a:p>
             <a:fld id="{CE74E66C-91F5-4692-A697-2FF5E9EDBD98}" type="datetimeFigureOut">
               <a:rPr lang="vi-VN" smtClean="0"/>
-              <a:t>14/03/2020</a:t>
+              <a:t>30/05/2024</a:t>
             </a:fld>
             <a:endParaRPr lang="vi-VN"/>
           </a:p>
@@ -1149,7 +1157,7 @@
           <a:lstStyle/>
           <a:p>
             <a:r>
-              <a:rPr lang="en-US" altLang="zh-TW" smtClean="0"/>
+              <a:rPr lang="en-US" altLang="zh-TW"/>
               <a:t>Click to edit Master title style</a:t>
             </a:r>
             <a:endParaRPr lang="zh-TW" altLang="en-US"/>
@@ -1206,35 +1214,35 @@
           <a:p>
             <a:pPr lvl="0"/>
             <a:r>
-              <a:rPr lang="en-US" altLang="zh-TW" smtClean="0"/>
+              <a:rPr lang="en-US" altLang="zh-TW"/>
               <a:t>Edit Master text styles</a:t>
             </a:r>
           </a:p>
           <a:p>
             <a:pPr lvl="1"/>
             <a:r>
-              <a:rPr lang="en-US" altLang="zh-TW" smtClean="0"/>
+              <a:rPr lang="en-US" altLang="zh-TW"/>
               <a:t>Second level</a:t>
             </a:r>
           </a:p>
           <a:p>
             <a:pPr lvl="2"/>
             <a:r>
-              <a:rPr lang="en-US" altLang="zh-TW" smtClean="0"/>
+              <a:rPr lang="en-US" altLang="zh-TW"/>
               <a:t>Third level</a:t>
             </a:r>
           </a:p>
           <a:p>
             <a:pPr lvl="3"/>
             <a:r>
-              <a:rPr lang="en-US" altLang="zh-TW" smtClean="0"/>
+              <a:rPr lang="en-US" altLang="zh-TW"/>
               <a:t>Fourth level</a:t>
             </a:r>
           </a:p>
           <a:p>
             <a:pPr lvl="4"/>
             <a:r>
-              <a:rPr lang="en-US" altLang="zh-TW" smtClean="0"/>
+              <a:rPr lang="en-US" altLang="zh-TW"/>
               <a:t>Fifth level</a:t>
             </a:r>
             <a:endParaRPr lang="zh-TW" altLang="en-US"/>
@@ -1291,35 +1299,35 @@
           <a:p>
             <a:pPr lvl="0"/>
             <a:r>
-              <a:rPr lang="en-US" altLang="zh-TW" smtClean="0"/>
+              <a:rPr lang="en-US" altLang="zh-TW"/>
               <a:t>Edit Master text styles</a:t>
             </a:r>
           </a:p>
           <a:p>
             <a:pPr lvl="1"/>
             <a:r>
-              <a:rPr lang="en-US" altLang="zh-TW" smtClean="0"/>
+              <a:rPr lang="en-US" altLang="zh-TW"/>
               <a:t>Second level</a:t>
             </a:r>
           </a:p>
           <a:p>
             <a:pPr lvl="2"/>
             <a:r>
-              <a:rPr lang="en-US" altLang="zh-TW" smtClean="0"/>
+              <a:rPr lang="en-US" altLang="zh-TW"/>
               <a:t>Third level</a:t>
             </a:r>
           </a:p>
           <a:p>
             <a:pPr lvl="3"/>
             <a:r>
-              <a:rPr lang="en-US" altLang="zh-TW" smtClean="0"/>
+              <a:rPr lang="en-US" altLang="zh-TW"/>
               <a:t>Fourth level</a:t>
             </a:r>
           </a:p>
           <a:p>
             <a:pPr lvl="4"/>
             <a:r>
-              <a:rPr lang="en-US" altLang="zh-TW" smtClean="0"/>
+              <a:rPr lang="en-US" altLang="zh-TW"/>
               <a:t>Fifth level</a:t>
             </a:r>
             <a:endParaRPr lang="zh-TW" altLang="en-US"/>
@@ -1343,7 +1351,7 @@
           <a:p>
             <a:fld id="{CE74E66C-91F5-4692-A697-2FF5E9EDBD98}" type="datetimeFigureOut">
               <a:rPr lang="vi-VN" smtClean="0"/>
-              <a:t>14/03/2020</a:t>
+              <a:t>30/05/2024</a:t>
             </a:fld>
             <a:endParaRPr lang="vi-VN"/>
           </a:p>
@@ -1441,7 +1449,7 @@
           </a:lstStyle>
           <a:p>
             <a:r>
-              <a:rPr lang="en-US" altLang="zh-TW" smtClean="0"/>
+              <a:rPr lang="en-US" altLang="zh-TW"/>
               <a:t>Click to edit Master title style</a:t>
             </a:r>
             <a:endParaRPr lang="zh-TW" altLang="en-US"/>
@@ -1507,7 +1515,7 @@
           <a:p>
             <a:pPr lvl="0"/>
             <a:r>
-              <a:rPr lang="en-US" altLang="zh-TW" smtClean="0"/>
+              <a:rPr lang="en-US" altLang="zh-TW"/>
               <a:t>Edit Master text styles</a:t>
             </a:r>
           </a:p>
@@ -1563,35 +1571,35 @@
           <a:p>
             <a:pPr lvl="0"/>
             <a:r>
-              <a:rPr lang="en-US" altLang="zh-TW" smtClean="0"/>
+              <a:rPr lang="en-US" altLang="zh-TW"/>
               <a:t>Edit Master text styles</a:t>
             </a:r>
           </a:p>
           <a:p>
             <a:pPr lvl="1"/>
             <a:r>
-              <a:rPr lang="en-US" altLang="zh-TW" smtClean="0"/>
+              <a:rPr lang="en-US" altLang="zh-TW"/>
               <a:t>Second level</a:t>
             </a:r>
           </a:p>
           <a:p>
             <a:pPr lvl="2"/>
             <a:r>
-              <a:rPr lang="en-US" altLang="zh-TW" smtClean="0"/>
+              <a:rPr lang="en-US" altLang="zh-TW"/>
               <a:t>Third level</a:t>
             </a:r>
           </a:p>
           <a:p>
             <a:pPr lvl="3"/>
             <a:r>
-              <a:rPr lang="en-US" altLang="zh-TW" smtClean="0"/>
+              <a:rPr lang="en-US" altLang="zh-TW"/>
               <a:t>Fourth level</a:t>
             </a:r>
           </a:p>
           <a:p>
             <a:pPr lvl="4"/>
             <a:r>
-              <a:rPr lang="en-US" altLang="zh-TW" smtClean="0"/>
+              <a:rPr lang="en-US" altLang="zh-TW"/>
               <a:t>Fifth level</a:t>
             </a:r>
             <a:endParaRPr lang="zh-TW" altLang="en-US"/>
@@ -1657,7 +1665,7 @@
           <a:p>
             <a:pPr lvl="0"/>
             <a:r>
-              <a:rPr lang="en-US" altLang="zh-TW" smtClean="0"/>
+              <a:rPr lang="en-US" altLang="zh-TW"/>
               <a:t>Edit Master text styles</a:t>
             </a:r>
           </a:p>
@@ -1713,35 +1721,35 @@
           <a:p>
             <a:pPr lvl="0"/>
             <a:r>
-              <a:rPr lang="en-US" altLang="zh-TW" smtClean="0"/>
+              <a:rPr lang="en-US" altLang="zh-TW"/>
               <a:t>Edit Master text styles</a:t>
             </a:r>
           </a:p>
           <a:p>
             <a:pPr lvl="1"/>
             <a:r>
-              <a:rPr lang="en-US" altLang="zh-TW" smtClean="0"/>
+              <a:rPr lang="en-US" altLang="zh-TW"/>
               <a:t>Second level</a:t>
             </a:r>
           </a:p>
           <a:p>
             <a:pPr lvl="2"/>
             <a:r>
-              <a:rPr lang="en-US" altLang="zh-TW" smtClean="0"/>
+              <a:rPr lang="en-US" altLang="zh-TW"/>
               <a:t>Third level</a:t>
             </a:r>
           </a:p>
           <a:p>
             <a:pPr lvl="3"/>
             <a:r>
-              <a:rPr lang="en-US" altLang="zh-TW" smtClean="0"/>
+              <a:rPr lang="en-US" altLang="zh-TW"/>
               <a:t>Fourth level</a:t>
             </a:r>
           </a:p>
           <a:p>
             <a:pPr lvl="4"/>
             <a:r>
-              <a:rPr lang="en-US" altLang="zh-TW" smtClean="0"/>
+              <a:rPr lang="en-US" altLang="zh-TW"/>
               <a:t>Fifth level</a:t>
             </a:r>
             <a:endParaRPr lang="zh-TW" altLang="en-US"/>
@@ -1765,7 +1773,7 @@
           <a:p>
             <a:fld id="{CE74E66C-91F5-4692-A697-2FF5E9EDBD98}" type="datetimeFigureOut">
               <a:rPr lang="vi-VN" smtClean="0"/>
-              <a:t>14/03/2020</a:t>
+              <a:t>30/05/2024</a:t>
             </a:fld>
             <a:endParaRPr lang="vi-VN"/>
           </a:p>
@@ -1859,7 +1867,7 @@
           <a:lstStyle/>
           <a:p>
             <a:r>
-              <a:rPr lang="en-US" altLang="zh-TW" smtClean="0"/>
+              <a:rPr lang="en-US" altLang="zh-TW"/>
               <a:t>Click to edit Master title style</a:t>
             </a:r>
             <a:endParaRPr lang="zh-TW" altLang="en-US"/>
@@ -1883,7 +1891,7 @@
           <a:p>
             <a:fld id="{CE74E66C-91F5-4692-A697-2FF5E9EDBD98}" type="datetimeFigureOut">
               <a:rPr lang="vi-VN" smtClean="0"/>
-              <a:t>14/03/2020</a:t>
+              <a:t>30/05/2024</a:t>
             </a:fld>
             <a:endParaRPr lang="vi-VN"/>
           </a:p>
@@ -1978,7 +1986,7 @@
           <a:p>
             <a:fld id="{CE74E66C-91F5-4692-A697-2FF5E9EDBD98}" type="datetimeFigureOut">
               <a:rPr lang="vi-VN" smtClean="0"/>
-              <a:t>14/03/2020</a:t>
+              <a:t>30/05/2024</a:t>
             </a:fld>
             <a:endParaRPr lang="vi-VN"/>
           </a:p>
@@ -2081,7 +2089,7 @@
           </a:lstStyle>
           <a:p>
             <a:r>
-              <a:rPr lang="en-US" altLang="zh-TW" smtClean="0"/>
+              <a:rPr lang="en-US" altLang="zh-TW"/>
               <a:t>Click to edit Master title style</a:t>
             </a:r>
             <a:endParaRPr lang="zh-TW" altLang="en-US"/>
@@ -2138,35 +2146,35 @@
           <a:p>
             <a:pPr lvl="0"/>
             <a:r>
-              <a:rPr lang="en-US" altLang="zh-TW" smtClean="0"/>
+              <a:rPr lang="en-US" altLang="zh-TW"/>
               <a:t>Edit Master text styles</a:t>
             </a:r>
           </a:p>
           <a:p>
             <a:pPr lvl="1"/>
             <a:r>
-              <a:rPr lang="en-US" altLang="zh-TW" smtClean="0"/>
+              <a:rPr lang="en-US" altLang="zh-TW"/>
               <a:t>Second level</a:t>
             </a:r>
           </a:p>
           <a:p>
             <a:pPr lvl="2"/>
             <a:r>
-              <a:rPr lang="en-US" altLang="zh-TW" smtClean="0"/>
+              <a:rPr lang="en-US" altLang="zh-TW"/>
               <a:t>Third level</a:t>
             </a:r>
           </a:p>
           <a:p>
             <a:pPr lvl="3"/>
             <a:r>
-              <a:rPr lang="en-US" altLang="zh-TW" smtClean="0"/>
+              <a:rPr lang="en-US" altLang="zh-TW"/>
               <a:t>Fourth level</a:t>
             </a:r>
           </a:p>
           <a:p>
             <a:pPr lvl="4"/>
             <a:r>
-              <a:rPr lang="en-US" altLang="zh-TW" smtClean="0"/>
+              <a:rPr lang="en-US" altLang="zh-TW"/>
               <a:t>Fifth level</a:t>
             </a:r>
             <a:endParaRPr lang="zh-TW" altLang="en-US"/>
@@ -2232,7 +2240,7 @@
           <a:p>
             <a:pPr lvl="0"/>
             <a:r>
-              <a:rPr lang="en-US" altLang="zh-TW" smtClean="0"/>
+              <a:rPr lang="en-US" altLang="zh-TW"/>
               <a:t>Edit Master text styles</a:t>
             </a:r>
           </a:p>
@@ -2255,7 +2263,7 @@
           <a:p>
             <a:fld id="{CE74E66C-91F5-4692-A697-2FF5E9EDBD98}" type="datetimeFigureOut">
               <a:rPr lang="vi-VN" smtClean="0"/>
-              <a:t>14/03/2020</a:t>
+              <a:t>30/05/2024</a:t>
             </a:fld>
             <a:endParaRPr lang="vi-VN"/>
           </a:p>
@@ -2358,7 +2366,7 @@
           </a:lstStyle>
           <a:p>
             <a:r>
-              <a:rPr lang="en-US" altLang="zh-TW" smtClean="0"/>
+              <a:rPr lang="en-US" altLang="zh-TW"/>
               <a:t>Click to edit Master title style</a:t>
             </a:r>
             <a:endParaRPr lang="zh-TW" altLang="en-US"/>
@@ -2423,7 +2431,7 @@
           </a:lstStyle>
           <a:p>
             <a:r>
-              <a:rPr lang="en-US" altLang="zh-TW" smtClean="0"/>
+              <a:rPr lang="en-US" altLang="zh-TW"/>
               <a:t>Click icon to add picture</a:t>
             </a:r>
             <a:endParaRPr lang="zh-TW" altLang="en-US"/>
@@ -2489,7 +2497,7 @@
           <a:p>
             <a:pPr lvl="0"/>
             <a:r>
-              <a:rPr lang="en-US" altLang="zh-TW" smtClean="0"/>
+              <a:rPr lang="en-US" altLang="zh-TW"/>
               <a:t>Edit Master text styles</a:t>
             </a:r>
           </a:p>
@@ -2512,7 +2520,7 @@
           <a:p>
             <a:fld id="{CE74E66C-91F5-4692-A697-2FF5E9EDBD98}" type="datetimeFigureOut">
               <a:rPr lang="vi-VN" smtClean="0"/>
-              <a:t>14/03/2020</a:t>
+              <a:t>30/05/2024</a:t>
             </a:fld>
             <a:endParaRPr lang="vi-VN"/>
           </a:p>
@@ -2626,10 +2634,9 @@
           <a:lstStyle/>
           <a:p>
             <a:r>
-              <a:rPr lang="zh-TW" altLang="en-US" smtClean="0"/>
+              <a:rPr lang="zh-TW" altLang="en-US"/>
               <a:t>按一下以編輯母片標題樣式</a:t>
             </a:r>
-            <a:endParaRPr lang="zh-TW" altLang="en-US"/>
           </a:p>
         </p:txBody>
       </p:sp>
@@ -2660,38 +2667,37 @@
           <a:p>
             <a:pPr lvl="0"/>
             <a:r>
-              <a:rPr lang="zh-TW" altLang="en-US" smtClean="0"/>
+              <a:rPr lang="zh-TW" altLang="en-US"/>
               <a:t>按一下以編輯母片文字樣式</a:t>
             </a:r>
           </a:p>
           <a:p>
             <a:pPr lvl="1"/>
             <a:r>
-              <a:rPr lang="zh-TW" altLang="en-US" smtClean="0"/>
+              <a:rPr lang="zh-TW" altLang="en-US"/>
               <a:t>第二層</a:t>
             </a:r>
           </a:p>
           <a:p>
             <a:pPr lvl="2"/>
             <a:r>
-              <a:rPr lang="zh-TW" altLang="en-US" smtClean="0"/>
+              <a:rPr lang="zh-TW" altLang="en-US"/>
               <a:t>第三層</a:t>
             </a:r>
           </a:p>
           <a:p>
             <a:pPr lvl="3"/>
             <a:r>
-              <a:rPr lang="zh-TW" altLang="en-US" smtClean="0"/>
+              <a:rPr lang="zh-TW" altLang="en-US"/>
               <a:t>第四層</a:t>
             </a:r>
           </a:p>
           <a:p>
             <a:pPr lvl="4"/>
             <a:r>
-              <a:rPr lang="zh-TW" altLang="en-US" smtClean="0"/>
+              <a:rPr lang="zh-TW" altLang="en-US"/>
               <a:t>第五層</a:t>
             </a:r>
-            <a:endParaRPr lang="zh-TW" altLang="en-US"/>
           </a:p>
         </p:txBody>
       </p:sp>
@@ -2730,7 +2736,7 @@
           <a:p>
             <a:fld id="{CE74E66C-91F5-4692-A697-2FF5E9EDBD98}" type="datetimeFigureOut">
               <a:rPr lang="vi-VN" smtClean="0"/>
-              <a:t>14/03/2020</a:t>
+              <a:t>30/05/2024</a:t>
             </a:fld>
             <a:endParaRPr lang="vi-VN"/>
           </a:p>
@@ -3107,7 +3113,7 @@
       </p:grpSpPr>
       <p:sp>
         <p:nvSpPr>
-          <p:cNvPr id="2" name="Title 1"/>
+          <p:cNvPr id="4" name="標題 3"/>
           <p:cNvSpPr>
             <a:spLocks noGrp="1"/>
           </p:cNvSpPr>
@@ -3115,177 +3121,48 @@
             <p:ph type="title"/>
           </p:nvPr>
         </p:nvSpPr>
-        <p:spPr/>
+        <p:spPr>
+          <a:xfrm>
+            <a:off x="0" y="2660915"/>
+            <a:ext cx="12192000" cy="1143000"/>
+          </a:xfrm>
+        </p:spPr>
         <p:txBody>
           <a:bodyPr>
-            <a:normAutofit/>
+            <a:noAutofit/>
           </a:bodyPr>
           <a:lstStyle/>
           <a:p>
             <a:r>
-              <a:rPr lang="zh-CN" altLang="en-US" sz="4800" b="1" dirty="0" smtClean="0">
-                <a:latin typeface="Microsoft JhengHei" panose="020B0604030504040204" pitchFamily="34" charset="-120"/>
-                <a:ea typeface="Microsoft JhengHei" panose="020B0604030504040204" pitchFamily="34" charset="-120"/>
+              <a:rPr lang="zh-CN" altLang="en-US" sz="7200" b="1" i="1" dirty="0">
+                <a:solidFill>
+                  <a:srgbClr val="660033"/>
+                </a:solidFill>
+                <a:effectLst>
+                  <a:outerShdw blurRad="38100" dist="38100" dir="2700000" algn="tl">
+                    <a:srgbClr val="000000">
+                      <a:alpha val="43137"/>
+                    </a:srgbClr>
+                  </a:outerShdw>
+                </a:effectLst>
+                <a:latin typeface="微軟正黑體" pitchFamily="34" charset="-120"/>
+                <a:ea typeface="微軟正黑體" pitchFamily="34" charset="-120"/>
               </a:rPr>
               <a:t>願</a:t>
             </a:r>
-            <a:endParaRPr lang="vi-VN" sz="4800" b="1" dirty="0">
-              <a:ea typeface="Microsoft JhengHei" panose="020B0604030504040204" pitchFamily="34" charset="-120"/>
-            </a:endParaRPr>
-          </a:p>
-        </p:txBody>
-      </p:sp>
-      <p:sp>
-        <p:nvSpPr>
-          <p:cNvPr id="3" name="Content Placeholder 2"/>
-          <p:cNvSpPr>
-            <a:spLocks noGrp="1"/>
-          </p:cNvSpPr>
-          <p:nvPr>
-            <p:ph idx="1"/>
-          </p:nvPr>
-        </p:nvSpPr>
-        <p:spPr/>
-        <p:txBody>
-          <a:bodyPr>
-            <a:normAutofit/>
-          </a:bodyPr>
-          <a:lstStyle/>
-          <a:p>
-            <a:pPr marL="0" indent="0" algn="ctr">
-              <a:buNone/>
-            </a:pPr>
-            <a:r>
-              <a:rPr lang="zh-CN" altLang="en-US" sz="5400" b="1" dirty="0">
-                <a:latin typeface="Microsoft JhengHei" panose="020B0604030504040204" pitchFamily="34" charset="-120"/>
-                <a:ea typeface="Microsoft JhengHei" panose="020B0604030504040204" pitchFamily="34" charset="-120"/>
-              </a:rPr>
-              <a:t>為這塊土</a:t>
-            </a:r>
-            <a:r>
-              <a:rPr lang="zh-CN" altLang="en-US" sz="5400" b="1" dirty="0" smtClean="0">
-                <a:latin typeface="Microsoft JhengHei" panose="020B0604030504040204" pitchFamily="34" charset="-120"/>
-                <a:ea typeface="Microsoft JhengHei" panose="020B0604030504040204" pitchFamily="34" charset="-120"/>
-              </a:rPr>
-              <a:t>地  我</a:t>
-            </a:r>
-            <a:r>
-              <a:rPr lang="zh-CN" altLang="en-US" sz="5400" b="1" dirty="0">
-                <a:latin typeface="Microsoft JhengHei" panose="020B0604030504040204" pitchFamily="34" charset="-120"/>
-                <a:ea typeface="Microsoft JhengHei" panose="020B0604030504040204" pitchFamily="34" charset="-120"/>
-              </a:rPr>
-              <a:t>誠心祈</a:t>
-            </a:r>
-            <a:r>
-              <a:rPr lang="zh-CN" altLang="en-US" sz="5400" b="1" dirty="0" smtClean="0">
-                <a:latin typeface="Microsoft JhengHei" panose="020B0604030504040204" pitchFamily="34" charset="-120"/>
-                <a:ea typeface="Microsoft JhengHei" panose="020B0604030504040204" pitchFamily="34" charset="-120"/>
-              </a:rPr>
-              <a:t>禱</a:t>
-            </a:r>
-            <a:endParaRPr lang="vi-VN" sz="5400" b="1" dirty="0">
-              <a:ea typeface="Microsoft JhengHei" panose="020B0604030504040204" pitchFamily="34" charset="-120"/>
-            </a:endParaRPr>
-          </a:p>
-          <a:p>
-            <a:pPr marL="0" indent="0" algn="ctr">
-              <a:buNone/>
-            </a:pPr>
-            <a:r>
-              <a:rPr lang="zh-CN" altLang="en-US" sz="5400" b="1" dirty="0">
-                <a:latin typeface="Microsoft JhengHei" panose="020B0604030504040204" pitchFamily="34" charset="-120"/>
-                <a:ea typeface="Microsoft JhengHei" panose="020B0604030504040204" pitchFamily="34" charset="-120"/>
-              </a:rPr>
-              <a:t>願主的真理如</a:t>
-            </a:r>
-            <a:r>
-              <a:rPr lang="zh-CN" altLang="en-US" sz="5400" b="1" dirty="0" smtClean="0">
-                <a:latin typeface="Microsoft JhengHei" panose="020B0604030504040204" pitchFamily="34" charset="-120"/>
-                <a:ea typeface="Microsoft JhengHei" panose="020B0604030504040204" pitchFamily="34" charset="-120"/>
-              </a:rPr>
-              <a:t>光  全</a:t>
-            </a:r>
-            <a:r>
-              <a:rPr lang="zh-CN" altLang="en-US" sz="5400" b="1" dirty="0">
-                <a:latin typeface="Microsoft JhengHei" panose="020B0604030504040204" pitchFamily="34" charset="-120"/>
-                <a:ea typeface="Microsoft JhengHei" panose="020B0604030504040204" pitchFamily="34" charset="-120"/>
-              </a:rPr>
-              <a:t>地遍</a:t>
-            </a:r>
-            <a:r>
-              <a:rPr lang="zh-CN" altLang="en-US" sz="5400" b="1" dirty="0" smtClean="0">
-                <a:latin typeface="Microsoft JhengHei" panose="020B0604030504040204" pitchFamily="34" charset="-120"/>
-                <a:ea typeface="Microsoft JhengHei" panose="020B0604030504040204" pitchFamily="34" charset="-120"/>
-              </a:rPr>
-              <a:t>照</a:t>
-            </a:r>
-            <a:endParaRPr lang="vi-VN" sz="5400" b="1" dirty="0">
-              <a:ea typeface="Microsoft JhengHei" panose="020B0604030504040204" pitchFamily="34" charset="-120"/>
-            </a:endParaRPr>
-          </a:p>
-          <a:p>
-            <a:pPr marL="0" indent="0" algn="ctr">
-              <a:buNone/>
-            </a:pPr>
-            <a:r>
-              <a:rPr lang="zh-CN" altLang="en-US" sz="5400" b="1" dirty="0">
-                <a:latin typeface="Microsoft JhengHei" panose="020B0604030504040204" pitchFamily="34" charset="-120"/>
-                <a:ea typeface="Microsoft JhengHei" panose="020B0604030504040204" pitchFamily="34" charset="-120"/>
-              </a:rPr>
-              <a:t>為這個城</a:t>
-            </a:r>
-            <a:r>
-              <a:rPr lang="zh-CN" altLang="en-US" sz="5400" b="1" dirty="0" smtClean="0">
-                <a:latin typeface="Microsoft JhengHei" panose="020B0604030504040204" pitchFamily="34" charset="-120"/>
-                <a:ea typeface="Microsoft JhengHei" panose="020B0604030504040204" pitchFamily="34" charset="-120"/>
-              </a:rPr>
-              <a:t>市  我</a:t>
-            </a:r>
-            <a:r>
-              <a:rPr lang="zh-CN" altLang="en-US" sz="5400" b="1" dirty="0">
-                <a:latin typeface="Microsoft JhengHei" panose="020B0604030504040204" pitchFamily="34" charset="-120"/>
-                <a:ea typeface="Microsoft JhengHei" panose="020B0604030504040204" pitchFamily="34" charset="-120"/>
-              </a:rPr>
-              <a:t>謙卑尋</a:t>
-            </a:r>
-            <a:r>
-              <a:rPr lang="zh-CN" altLang="en-US" sz="5400" b="1" dirty="0" smtClean="0">
-                <a:latin typeface="Microsoft JhengHei" panose="020B0604030504040204" pitchFamily="34" charset="-120"/>
-                <a:ea typeface="Microsoft JhengHei" panose="020B0604030504040204" pitchFamily="34" charset="-120"/>
-              </a:rPr>
-              <a:t>找</a:t>
-            </a:r>
-            <a:endParaRPr lang="vi-VN" sz="5400" b="1" dirty="0">
-              <a:ea typeface="Microsoft JhengHei" panose="020B0604030504040204" pitchFamily="34" charset="-120"/>
-            </a:endParaRPr>
-          </a:p>
-          <a:p>
-            <a:pPr marL="0" indent="0" algn="ctr">
-              <a:buNone/>
-            </a:pPr>
-            <a:r>
-              <a:rPr lang="zh-CN" altLang="en-US" sz="5400" b="1" dirty="0">
-                <a:latin typeface="Microsoft JhengHei" panose="020B0604030504040204" pitchFamily="34" charset="-120"/>
-                <a:ea typeface="Microsoft JhengHei" panose="020B0604030504040204" pitchFamily="34" charset="-120"/>
-              </a:rPr>
-              <a:t>願主的生</a:t>
-            </a:r>
-            <a:r>
-              <a:rPr lang="zh-CN" altLang="en-US" sz="5400" b="1" dirty="0" smtClean="0">
-                <a:latin typeface="Microsoft JhengHei" panose="020B0604030504040204" pitchFamily="34" charset="-120"/>
-                <a:ea typeface="Microsoft JhengHei" panose="020B0604030504040204" pitchFamily="34" charset="-120"/>
-              </a:rPr>
-              <a:t>命  臨</a:t>
-            </a:r>
-            <a:r>
-              <a:rPr lang="zh-CN" altLang="en-US" sz="5400" b="1" dirty="0">
-                <a:latin typeface="Microsoft JhengHei" panose="020B0604030504040204" pitchFamily="34" charset="-120"/>
-                <a:ea typeface="Microsoft JhengHei" panose="020B0604030504040204" pitchFamily="34" charset="-120"/>
-              </a:rPr>
-              <a:t>到這些百姓</a:t>
-            </a:r>
-            <a:endParaRPr lang="vi-VN" sz="5400" b="1" dirty="0">
-              <a:ea typeface="Microsoft JhengHei" panose="020B0604030504040204" pitchFamily="34" charset="-120"/>
+            <a:endParaRPr lang="zh-TW" altLang="en-US" sz="7200" b="1" i="1" dirty="0">
+              <a:solidFill>
+                <a:srgbClr val="660033"/>
+              </a:solidFill>
+              <a:effectLst>
+                <a:outerShdw blurRad="38100" dist="38100" dir="2700000" algn="tl">
+                  <a:srgbClr val="000000">
+                    <a:alpha val="43137"/>
+                  </a:srgbClr>
+                </a:outerShdw>
+              </a:effectLst>
+              <a:latin typeface="微軟正黑體" pitchFamily="34" charset="-120"/>
+              <a:ea typeface="微軟正黑體" pitchFamily="34" charset="-120"/>
             </a:endParaRPr>
           </a:p>
         </p:txBody>
@@ -3293,7 +3170,7 @@
     </p:spTree>
     <p:extLst>
       <p:ext uri="{BB962C8B-B14F-4D97-AF65-F5344CB8AC3E}">
-        <p14:creationId xmlns:p14="http://schemas.microsoft.com/office/powerpoint/2010/main" val="3319770767"/>
+        <p14:creationId xmlns:p14="http://schemas.microsoft.com/office/powerpoint/2010/main" val="1795979687"/>
       </p:ext>
     </p:extLst>
   </p:cSld>
@@ -3322,216 +3199,597 @@
       </p:grpSpPr>
       <p:sp>
         <p:nvSpPr>
-          <p:cNvPr id="2" name="Title 1"/>
-          <p:cNvSpPr>
-            <a:spLocks noGrp="1"/>
-          </p:cNvSpPr>
-          <p:nvPr>
-            <p:ph type="title"/>
-          </p:nvPr>
-        </p:nvSpPr>
-        <p:spPr/>
-        <p:txBody>
-          <a:bodyPr>
+          <p:cNvPr id="5" name="內容版面配置區 4"/>
+          <p:cNvSpPr>
+            <a:spLocks noGrp="1"/>
+          </p:cNvSpPr>
+          <p:nvPr>
+            <p:ph idx="1"/>
+          </p:nvPr>
+        </p:nvSpPr>
+        <p:spPr>
+          <a:xfrm>
+            <a:off x="0" y="2084851"/>
+            <a:ext cx="12192000" cy="2404863"/>
+          </a:xfrm>
+        </p:spPr>
+        <p:txBody>
+          <a:bodyPr anchor="ctr">
             <a:normAutofit/>
           </a:bodyPr>
           <a:lstStyle/>
           <a:p>
-            <a:r>
-              <a:rPr lang="zh-CN" altLang="en-US" sz="4800" b="1" dirty="0" smtClean="0">
+            <a:pPr marL="0" indent="0" algn="ctr">
+              <a:buNone/>
+            </a:pPr>
+            <a:r>
+              <a:rPr lang="zh-CN" altLang="en-US" sz="6400" b="1" dirty="0">
+                <a:solidFill>
+                  <a:srgbClr val="660033"/>
+                </a:solidFill>
+                <a:latin typeface="微軟正黑體" pitchFamily="34" charset="-120"/>
+                <a:ea typeface="微軟正黑體" pitchFamily="34" charset="-120"/>
+              </a:rPr>
+              <a:t>為這塊土地  我誠心祈禱</a:t>
+            </a:r>
+            <a:endParaRPr lang="vi-VN" sz="6400" b="1" dirty="0">
+              <a:solidFill>
+                <a:srgbClr val="660033"/>
+              </a:solidFill>
+              <a:ea typeface="微軟正黑體" pitchFamily="34" charset="-120"/>
+            </a:endParaRPr>
+          </a:p>
+          <a:p>
+            <a:pPr marL="0" indent="0" algn="ctr">
+              <a:buNone/>
+            </a:pPr>
+            <a:r>
+              <a:rPr lang="zh-CN" altLang="en-US" sz="6400" b="1" dirty="0">
+                <a:solidFill>
+                  <a:srgbClr val="660033"/>
+                </a:solidFill>
+                <a:latin typeface="微軟正黑體" pitchFamily="34" charset="-120"/>
+                <a:ea typeface="微軟正黑體" pitchFamily="34" charset="-120"/>
+              </a:rPr>
+              <a:t>願主的真理如光  全地遍照</a:t>
+            </a:r>
+            <a:endParaRPr lang="vi-VN" sz="6400" b="1" dirty="0">
+              <a:solidFill>
+                <a:srgbClr val="660033"/>
+              </a:solidFill>
+              <a:ea typeface="微軟正黑體" pitchFamily="34" charset="-120"/>
+            </a:endParaRPr>
+          </a:p>
+        </p:txBody>
+      </p:sp>
+      <p:sp>
+        <p:nvSpPr>
+          <p:cNvPr id="3" name="TextBox 2"/>
+          <p:cNvSpPr txBox="1"/>
+          <p:nvPr/>
+        </p:nvSpPr>
+        <p:spPr>
+          <a:xfrm>
+            <a:off x="0" y="5157192"/>
+            <a:ext cx="12192000" cy="666786"/>
+          </a:xfrm>
+          <a:prstGeom prst="rect">
+            <a:avLst/>
+          </a:prstGeom>
+          <a:noFill/>
+        </p:spPr>
+        <p:txBody>
+          <a:bodyPr wrap="square" rtlCol="0">
+            <a:spAutoFit/>
+          </a:bodyPr>
+          <a:lstStyle/>
+          <a:p>
+            <a:pPr algn="ctr"/>
+            <a:r>
+              <a:rPr lang="en-US" sz="3733" b="1" dirty="0">
+                <a:solidFill>
+                  <a:srgbClr val="660033"/>
+                </a:solidFill>
                 <a:latin typeface="Microsoft JhengHei" panose="020B0604030504040204" pitchFamily="34" charset="-120"/>
                 <a:ea typeface="Microsoft JhengHei" panose="020B0604030504040204" pitchFamily="34" charset="-120"/>
               </a:rPr>
-              <a:t>願</a:t>
-            </a:r>
-            <a:endParaRPr lang="vi-VN" sz="4800" b="1" dirty="0">
-              <a:ea typeface="Microsoft JhengHei" panose="020B0604030504040204" pitchFamily="34" charset="-120"/>
-            </a:endParaRPr>
-          </a:p>
-        </p:txBody>
-      </p:sp>
-      <p:sp>
-        <p:nvSpPr>
-          <p:cNvPr id="3" name="Content Placeholder 2"/>
-          <p:cNvSpPr>
-            <a:spLocks noGrp="1"/>
-          </p:cNvSpPr>
-          <p:nvPr>
-            <p:ph idx="1"/>
-          </p:nvPr>
-        </p:nvSpPr>
-        <p:spPr/>
-        <p:txBody>
-          <a:bodyPr>
-            <a:normAutofit/>
-          </a:bodyPr>
-          <a:lstStyle/>
-          <a:p>
-            <a:pPr marL="0" indent="0" algn="ctr">
-              <a:buNone/>
-            </a:pPr>
-            <a:r>
-              <a:rPr lang="zh-CN" altLang="en-US" sz="5400" b="1" dirty="0">
+              <a:t>( </a:t>
+            </a:r>
+            <a:r>
+              <a:rPr lang="zh-CN" altLang="en-US" sz="3733" b="1" dirty="0">
+                <a:solidFill>
+                  <a:srgbClr val="660033"/>
+                </a:solidFill>
                 <a:latin typeface="Microsoft JhengHei" panose="020B0604030504040204" pitchFamily="34" charset="-120"/>
                 <a:ea typeface="Microsoft JhengHei" panose="020B0604030504040204" pitchFamily="34" charset="-120"/>
               </a:rPr>
-              <a:t>我全能阿爸天</a:t>
-            </a:r>
-            <a:r>
-              <a:rPr lang="zh-CN" altLang="en-US" sz="5400" b="1" dirty="0">
+              <a:t>正歌</a:t>
+            </a:r>
+            <a:r>
+              <a:rPr lang="en-US" sz="3733" b="1" dirty="0">
+                <a:solidFill>
+                  <a:srgbClr val="660033"/>
+                </a:solidFill>
                 <a:latin typeface="Microsoft JhengHei" panose="020B0604030504040204" pitchFamily="34" charset="-120"/>
                 <a:ea typeface="Microsoft JhengHei" panose="020B0604030504040204" pitchFamily="34" charset="-120"/>
               </a:rPr>
-              <a:t>父  </a:t>
-            </a:r>
-            <a:r>
-              <a:rPr lang="zh-CN" altLang="en-US" sz="5400" b="1" dirty="0" smtClean="0">
+              <a:t> )</a:t>
+            </a:r>
+            <a:endParaRPr lang="vi-VN" sz="3733" b="1" dirty="0">
+              <a:solidFill>
+                <a:srgbClr val="660033"/>
+              </a:solidFill>
+              <a:ea typeface="Microsoft JhengHei" panose="020B0604030504040204" pitchFamily="34" charset="-120"/>
+            </a:endParaRPr>
+          </a:p>
+        </p:txBody>
+      </p:sp>
+    </p:spTree>
+    <p:extLst>
+      <p:ext uri="{BB962C8B-B14F-4D97-AF65-F5344CB8AC3E}">
+        <p14:creationId xmlns:p14="http://schemas.microsoft.com/office/powerpoint/2010/main" val="4091857676"/>
+      </p:ext>
+    </p:extLst>
+  </p:cSld>
+  <p:clrMapOvr>
+    <a:masterClrMapping/>
+  </p:clrMapOvr>
+</p:sld>
+</file>
+
+<file path=ppt/slides/slide3.xml><?xml version="1.0" encoding="utf-8"?>
+<p:sld xmlns:a="http://schemas.openxmlformats.org/drawingml/2006/main" xmlns:r="http://schemas.openxmlformats.org/officeDocument/2006/relationships" xmlns:p="http://schemas.openxmlformats.org/presentationml/2006/main">
+  <p:cSld>
+    <p:spTree>
+      <p:nvGrpSpPr>
+        <p:cNvPr id="1" name=""/>
+        <p:cNvGrpSpPr/>
+        <p:nvPr/>
+      </p:nvGrpSpPr>
+      <p:grpSpPr>
+        <a:xfrm>
+          <a:off x="0" y="0"/>
+          <a:ext cx="0" cy="0"/>
+          <a:chOff x="0" y="0"/>
+          <a:chExt cx="0" cy="0"/>
+        </a:xfrm>
+      </p:grpSpPr>
+      <p:sp>
+        <p:nvSpPr>
+          <p:cNvPr id="5" name="內容版面配置區 4"/>
+          <p:cNvSpPr>
+            <a:spLocks noGrp="1"/>
+          </p:cNvSpPr>
+          <p:nvPr>
+            <p:ph idx="1"/>
+          </p:nvPr>
+        </p:nvSpPr>
+        <p:spPr>
+          <a:xfrm>
+            <a:off x="0" y="2084851"/>
+            <a:ext cx="12192000" cy="2404863"/>
+          </a:xfrm>
+        </p:spPr>
+        <p:txBody>
+          <a:bodyPr anchor="ctr">
+            <a:normAutofit/>
+          </a:bodyPr>
+          <a:lstStyle/>
+          <a:p>
+            <a:pPr marL="0" indent="0" algn="ctr">
+              <a:buNone/>
+            </a:pPr>
+            <a:r>
+              <a:rPr lang="zh-CN" altLang="en-US" sz="6400" b="1" dirty="0">
+                <a:solidFill>
+                  <a:srgbClr val="660033"/>
+                </a:solidFill>
+                <a:latin typeface="微軟正黑體" pitchFamily="34" charset="-120"/>
+                <a:ea typeface="微軟正黑體" pitchFamily="34" charset="-120"/>
+              </a:rPr>
+              <a:t>為這個城市  我謙卑尋找</a:t>
+            </a:r>
+            <a:endParaRPr lang="vi-VN" sz="6400" b="1" dirty="0">
+              <a:solidFill>
+                <a:srgbClr val="660033"/>
+              </a:solidFill>
+              <a:ea typeface="微軟正黑體" pitchFamily="34" charset="-120"/>
+            </a:endParaRPr>
+          </a:p>
+          <a:p>
+            <a:pPr marL="0" indent="0" algn="ctr">
+              <a:buNone/>
+            </a:pPr>
+            <a:r>
+              <a:rPr lang="zh-CN" altLang="en-US" sz="6400" b="1" dirty="0">
+                <a:solidFill>
+                  <a:srgbClr val="660033"/>
+                </a:solidFill>
+                <a:latin typeface="微軟正黑體" pitchFamily="34" charset="-120"/>
+                <a:ea typeface="微軟正黑體" pitchFamily="34" charset="-120"/>
+              </a:rPr>
+              <a:t>願主的生命  臨到這些百姓</a:t>
+            </a:r>
+            <a:endParaRPr lang="vi-VN" sz="6400" b="1" dirty="0">
+              <a:solidFill>
+                <a:srgbClr val="660033"/>
+              </a:solidFill>
+              <a:ea typeface="微軟正黑體" pitchFamily="34" charset="-120"/>
+            </a:endParaRPr>
+          </a:p>
+        </p:txBody>
+      </p:sp>
+      <p:sp>
+        <p:nvSpPr>
+          <p:cNvPr id="3" name="TextBox 2"/>
+          <p:cNvSpPr txBox="1"/>
+          <p:nvPr/>
+        </p:nvSpPr>
+        <p:spPr>
+          <a:xfrm>
+            <a:off x="0" y="5157192"/>
+            <a:ext cx="12192000" cy="666786"/>
+          </a:xfrm>
+          <a:prstGeom prst="rect">
+            <a:avLst/>
+          </a:prstGeom>
+          <a:noFill/>
+        </p:spPr>
+        <p:txBody>
+          <a:bodyPr wrap="square" rtlCol="0">
+            <a:spAutoFit/>
+          </a:bodyPr>
+          <a:lstStyle/>
+          <a:p>
+            <a:pPr algn="ctr"/>
+            <a:r>
+              <a:rPr lang="en-US" sz="3733" b="1" dirty="0">
+                <a:solidFill>
+                  <a:srgbClr val="660033"/>
+                </a:solidFill>
                 <a:latin typeface="Microsoft JhengHei" panose="020B0604030504040204" pitchFamily="34" charset="-120"/>
                 <a:ea typeface="Microsoft JhengHei" panose="020B0604030504040204" pitchFamily="34" charset="-120"/>
               </a:rPr>
-              <a:t>願</a:t>
-            </a:r>
-            <a:r>
-              <a:rPr lang="zh-CN" altLang="en-US" sz="5400" b="1" dirty="0">
+              <a:t>( </a:t>
+            </a:r>
+            <a:r>
+              <a:rPr lang="zh-CN" altLang="en-US" sz="3733" b="1" dirty="0">
+                <a:solidFill>
+                  <a:srgbClr val="660033"/>
+                </a:solidFill>
                 <a:latin typeface="Microsoft JhengHei" panose="020B0604030504040204" pitchFamily="34" charset="-120"/>
                 <a:ea typeface="Microsoft JhengHei" panose="020B0604030504040204" pitchFamily="34" charset="-120"/>
               </a:rPr>
-              <a:t>袮</a:t>
-            </a:r>
-            <a:r>
-              <a:rPr lang="zh-CN" altLang="en-US" sz="5400" b="1" dirty="0" smtClean="0">
+              <a:t>正歌</a:t>
+            </a:r>
+            <a:r>
+              <a:rPr lang="en-US" sz="3733" b="1" dirty="0">
+                <a:solidFill>
+                  <a:srgbClr val="660033"/>
+                </a:solidFill>
                 <a:latin typeface="Microsoft JhengHei" panose="020B0604030504040204" pitchFamily="34" charset="-120"/>
                 <a:ea typeface="Microsoft JhengHei" panose="020B0604030504040204" pitchFamily="34" charset="-120"/>
               </a:rPr>
-              <a:t>國</a:t>
-            </a:r>
-            <a:r>
-              <a:rPr lang="zh-CN" altLang="en-US" sz="5400" b="1" dirty="0">
+              <a:t> )</a:t>
+            </a:r>
+            <a:endParaRPr lang="vi-VN" sz="3733" b="1" dirty="0">
+              <a:solidFill>
+                <a:srgbClr val="660033"/>
+              </a:solidFill>
+              <a:ea typeface="Microsoft JhengHei" panose="020B0604030504040204" pitchFamily="34" charset="-120"/>
+            </a:endParaRPr>
+          </a:p>
+        </p:txBody>
+      </p:sp>
+    </p:spTree>
+    <p:extLst>
+      <p:ext uri="{BB962C8B-B14F-4D97-AF65-F5344CB8AC3E}">
+        <p14:creationId xmlns:p14="http://schemas.microsoft.com/office/powerpoint/2010/main" val="944559312"/>
+      </p:ext>
+    </p:extLst>
+  </p:cSld>
+  <p:clrMapOvr>
+    <a:masterClrMapping/>
+  </p:clrMapOvr>
+</p:sld>
+</file>
+
+<file path=ppt/slides/slide4.xml><?xml version="1.0" encoding="utf-8"?>
+<p:sld xmlns:a="http://schemas.openxmlformats.org/drawingml/2006/main" xmlns:r="http://schemas.openxmlformats.org/officeDocument/2006/relationships" xmlns:p="http://schemas.openxmlformats.org/presentationml/2006/main">
+  <p:cSld>
+    <p:spTree>
+      <p:nvGrpSpPr>
+        <p:cNvPr id="1" name=""/>
+        <p:cNvGrpSpPr/>
+        <p:nvPr/>
+      </p:nvGrpSpPr>
+      <p:grpSpPr>
+        <a:xfrm>
+          <a:off x="0" y="0"/>
+          <a:ext cx="0" cy="0"/>
+          <a:chOff x="0" y="0"/>
+          <a:chExt cx="0" cy="0"/>
+        </a:xfrm>
+      </p:grpSpPr>
+      <p:sp>
+        <p:nvSpPr>
+          <p:cNvPr id="5" name="內容版面配置區 4"/>
+          <p:cNvSpPr>
+            <a:spLocks noGrp="1"/>
+          </p:cNvSpPr>
+          <p:nvPr>
+            <p:ph idx="1"/>
+          </p:nvPr>
+        </p:nvSpPr>
+        <p:spPr>
+          <a:xfrm>
+            <a:off x="0" y="2084851"/>
+            <a:ext cx="12192000" cy="2404863"/>
+          </a:xfrm>
+        </p:spPr>
+        <p:txBody>
+          <a:bodyPr anchor="ctr">
+            <a:normAutofit/>
+          </a:bodyPr>
+          <a:lstStyle/>
+          <a:p>
+            <a:pPr marL="0" indent="0" algn="ctr">
+              <a:buNone/>
+            </a:pPr>
+            <a:r>
+              <a:rPr lang="zh-CN" altLang="en-US" sz="6400" b="1" dirty="0">
+                <a:solidFill>
+                  <a:srgbClr val="660033"/>
+                </a:solidFill>
+                <a:latin typeface="微軟正黑體" pitchFamily="34" charset="-120"/>
+                <a:ea typeface="微軟正黑體" pitchFamily="34" charset="-120"/>
+              </a:rPr>
+              <a:t>我全能阿爸天父  願祢國降臨</a:t>
+            </a:r>
+            <a:endParaRPr lang="vi-VN" sz="6400" b="1" dirty="0">
+              <a:solidFill>
+                <a:srgbClr val="660033"/>
+              </a:solidFill>
+              <a:ea typeface="微軟正黑體" pitchFamily="34" charset="-120"/>
+            </a:endParaRPr>
+          </a:p>
+          <a:p>
+            <a:pPr marL="0" indent="0" algn="ctr">
+              <a:buNone/>
+            </a:pPr>
+            <a:r>
+              <a:rPr lang="zh-CN" altLang="en-US" sz="6400" b="1" dirty="0">
+                <a:solidFill>
+                  <a:srgbClr val="660033"/>
+                </a:solidFill>
+                <a:latin typeface="微軟正黑體" pitchFamily="34" charset="-120"/>
+                <a:ea typeface="微軟正黑體" pitchFamily="34" charset="-120"/>
+              </a:rPr>
+              <a:t>願貧窮與悲傷離開我的心中</a:t>
+            </a:r>
+            <a:endParaRPr lang="vi-VN" sz="6400" b="1" dirty="0">
+              <a:solidFill>
+                <a:srgbClr val="660033"/>
+              </a:solidFill>
+              <a:ea typeface="微軟正黑體" pitchFamily="34" charset="-120"/>
+            </a:endParaRPr>
+          </a:p>
+        </p:txBody>
+      </p:sp>
+      <p:sp>
+        <p:nvSpPr>
+          <p:cNvPr id="3" name="TextBox 2"/>
+          <p:cNvSpPr txBox="1"/>
+          <p:nvPr/>
+        </p:nvSpPr>
+        <p:spPr>
+          <a:xfrm>
+            <a:off x="0" y="5157192"/>
+            <a:ext cx="12192000" cy="666786"/>
+          </a:xfrm>
+          <a:prstGeom prst="rect">
+            <a:avLst/>
+          </a:prstGeom>
+          <a:noFill/>
+        </p:spPr>
+        <p:txBody>
+          <a:bodyPr wrap="square" rtlCol="0">
+            <a:spAutoFit/>
+          </a:bodyPr>
+          <a:lstStyle/>
+          <a:p>
+            <a:pPr algn="ctr"/>
+            <a:r>
+              <a:rPr lang="en-US" sz="3733" b="1" dirty="0">
+                <a:solidFill>
+                  <a:srgbClr val="660033"/>
+                </a:solidFill>
                 <a:latin typeface="Microsoft JhengHei" panose="020B0604030504040204" pitchFamily="34" charset="-120"/>
                 <a:ea typeface="Microsoft JhengHei" panose="020B0604030504040204" pitchFamily="34" charset="-120"/>
               </a:rPr>
-              <a:t>降</a:t>
-            </a:r>
-            <a:r>
-              <a:rPr lang="zh-CN" altLang="en-US" sz="5400" b="1" dirty="0">
+              <a:t>( </a:t>
+            </a:r>
+            <a:r>
+              <a:rPr lang="zh-CN" altLang="en-US" sz="3733" b="1" dirty="0">
+                <a:solidFill>
+                  <a:srgbClr val="660033"/>
+                </a:solidFill>
                 <a:latin typeface="Microsoft JhengHei" panose="020B0604030504040204" pitchFamily="34" charset="-120"/>
                 <a:ea typeface="Microsoft JhengHei" panose="020B0604030504040204" pitchFamily="34" charset="-120"/>
               </a:rPr>
-              <a:t>臨</a:t>
-            </a:r>
-            <a:endParaRPr lang="vi-VN" sz="5400" b="1" dirty="0">
-              <a:latin typeface="Microsoft JhengHei" panose="020B0604030504040204" pitchFamily="34" charset="-120"/>
-              <a:ea typeface="Microsoft JhengHei" panose="020B0604030504040204" pitchFamily="34" charset="-120"/>
-            </a:endParaRPr>
-          </a:p>
-          <a:p>
-            <a:pPr marL="0" indent="0" algn="ctr">
-              <a:buNone/>
-            </a:pPr>
-            <a:r>
-              <a:rPr lang="zh-CN" altLang="en-US" sz="5400" b="1" dirty="0">
+              <a:t>副歌</a:t>
+            </a:r>
+            <a:r>
+              <a:rPr lang="en-US" sz="3733" b="1" dirty="0">
+                <a:solidFill>
+                  <a:srgbClr val="660033"/>
+                </a:solidFill>
                 <a:latin typeface="Microsoft JhengHei" panose="020B0604030504040204" pitchFamily="34" charset="-120"/>
                 <a:ea typeface="Microsoft JhengHei" panose="020B0604030504040204" pitchFamily="34" charset="-120"/>
               </a:rPr>
-              <a:t>願貧窮與悲傷離開我的心</a:t>
-            </a:r>
-            <a:r>
-              <a:rPr lang="zh-CN" altLang="en-US" sz="5400" b="1" dirty="0">
+              <a:t> )</a:t>
+            </a:r>
+            <a:endParaRPr lang="vi-VN" sz="3733" b="1" dirty="0">
+              <a:solidFill>
+                <a:srgbClr val="660033"/>
+              </a:solidFill>
+              <a:ea typeface="Microsoft JhengHei" panose="020B0604030504040204" pitchFamily="34" charset="-120"/>
+            </a:endParaRPr>
+          </a:p>
+        </p:txBody>
+      </p:sp>
+    </p:spTree>
+    <p:extLst>
+      <p:ext uri="{BB962C8B-B14F-4D97-AF65-F5344CB8AC3E}">
+        <p14:creationId xmlns:p14="http://schemas.microsoft.com/office/powerpoint/2010/main" val="2952407326"/>
+      </p:ext>
+    </p:extLst>
+  </p:cSld>
+  <p:clrMapOvr>
+    <a:masterClrMapping/>
+  </p:clrMapOvr>
+</p:sld>
+</file>
+
+<file path=ppt/slides/slide5.xml><?xml version="1.0" encoding="utf-8"?>
+<p:sld xmlns:a="http://schemas.openxmlformats.org/drawingml/2006/main" xmlns:r="http://schemas.openxmlformats.org/officeDocument/2006/relationships" xmlns:p="http://schemas.openxmlformats.org/presentationml/2006/main">
+  <p:cSld>
+    <p:spTree>
+      <p:nvGrpSpPr>
+        <p:cNvPr id="1" name=""/>
+        <p:cNvGrpSpPr/>
+        <p:nvPr/>
+      </p:nvGrpSpPr>
+      <p:grpSpPr>
+        <a:xfrm>
+          <a:off x="0" y="0"/>
+          <a:ext cx="0" cy="0"/>
+          <a:chOff x="0" y="0"/>
+          <a:chExt cx="0" cy="0"/>
+        </a:xfrm>
+      </p:grpSpPr>
+      <p:sp>
+        <p:nvSpPr>
+          <p:cNvPr id="5" name="內容版面配置區 4"/>
+          <p:cNvSpPr>
+            <a:spLocks noGrp="1"/>
+          </p:cNvSpPr>
+          <p:nvPr>
+            <p:ph idx="1"/>
+          </p:nvPr>
+        </p:nvSpPr>
+        <p:spPr>
+          <a:xfrm>
+            <a:off x="0" y="2084851"/>
+            <a:ext cx="12192000" cy="2404863"/>
+          </a:xfrm>
+        </p:spPr>
+        <p:txBody>
+          <a:bodyPr anchor="ctr">
+            <a:normAutofit/>
+          </a:bodyPr>
+          <a:lstStyle/>
+          <a:p>
+            <a:pPr marL="0" indent="0" algn="ctr">
+              <a:buNone/>
+            </a:pPr>
+            <a:r>
+              <a:rPr lang="zh-CN" altLang="en-US" sz="6400" b="1" dirty="0">
+                <a:solidFill>
+                  <a:srgbClr val="660033"/>
+                </a:solidFill>
+                <a:latin typeface="微軟正黑體" pitchFamily="34" charset="-120"/>
+                <a:ea typeface="微軟正黑體" pitchFamily="34" charset="-120"/>
+              </a:rPr>
+              <a:t>我全能阿爸天父  願祢國降臨</a:t>
+            </a:r>
+            <a:endParaRPr lang="vi-VN" sz="6400" b="1" dirty="0">
+              <a:solidFill>
+                <a:srgbClr val="660033"/>
+              </a:solidFill>
+              <a:ea typeface="微軟正黑體" pitchFamily="34" charset="-120"/>
+            </a:endParaRPr>
+          </a:p>
+          <a:p>
+            <a:pPr marL="0" indent="0" algn="ctr">
+              <a:buNone/>
+            </a:pPr>
+            <a:r>
+              <a:rPr lang="zh-CN" altLang="en-US" sz="6400" b="1" dirty="0">
+                <a:solidFill>
+                  <a:srgbClr val="660033"/>
+                </a:solidFill>
+                <a:latin typeface="微軟正黑體" pitchFamily="34" charset="-120"/>
+                <a:ea typeface="微軟正黑體" pitchFamily="34" charset="-120"/>
+              </a:rPr>
+              <a:t>願盼望與喜樂  永遠住我心中</a:t>
+            </a:r>
+            <a:endParaRPr lang="vi-VN" sz="6400" b="1" dirty="0">
+              <a:solidFill>
+                <a:srgbClr val="660033"/>
+              </a:solidFill>
+              <a:ea typeface="微軟正黑體" pitchFamily="34" charset="-120"/>
+            </a:endParaRPr>
+          </a:p>
+        </p:txBody>
+      </p:sp>
+      <p:sp>
+        <p:nvSpPr>
+          <p:cNvPr id="3" name="TextBox 2"/>
+          <p:cNvSpPr txBox="1"/>
+          <p:nvPr/>
+        </p:nvSpPr>
+        <p:spPr>
+          <a:xfrm>
+            <a:off x="0" y="5157192"/>
+            <a:ext cx="12192000" cy="666786"/>
+          </a:xfrm>
+          <a:prstGeom prst="rect">
+            <a:avLst/>
+          </a:prstGeom>
+          <a:noFill/>
+        </p:spPr>
+        <p:txBody>
+          <a:bodyPr wrap="square" rtlCol="0">
+            <a:spAutoFit/>
+          </a:bodyPr>
+          <a:lstStyle/>
+          <a:p>
+            <a:pPr algn="ctr"/>
+            <a:r>
+              <a:rPr lang="en-US" sz="3733" b="1" dirty="0">
+                <a:solidFill>
+                  <a:srgbClr val="660033"/>
+                </a:solidFill>
                 <a:latin typeface="Microsoft JhengHei" panose="020B0604030504040204" pitchFamily="34" charset="-120"/>
                 <a:ea typeface="Microsoft JhengHei" panose="020B0604030504040204" pitchFamily="34" charset="-120"/>
               </a:rPr>
-              <a:t>中</a:t>
-            </a:r>
-            <a:endParaRPr lang="vi-VN" sz="5400" b="1" dirty="0">
-              <a:latin typeface="Microsoft JhengHei" panose="020B0604030504040204" pitchFamily="34" charset="-120"/>
-              <a:ea typeface="Microsoft JhengHei" panose="020B0604030504040204" pitchFamily="34" charset="-120"/>
-            </a:endParaRPr>
-          </a:p>
-          <a:p>
-            <a:pPr marL="0" indent="0" algn="ctr">
-              <a:buNone/>
-            </a:pPr>
-            <a:r>
-              <a:rPr lang="zh-CN" altLang="en-US" sz="5400" b="1" dirty="0">
+              <a:t>( </a:t>
+            </a:r>
+            <a:r>
+              <a:rPr lang="zh-CN" altLang="en-US" sz="3733" b="1" dirty="0">
+                <a:solidFill>
+                  <a:srgbClr val="660033"/>
+                </a:solidFill>
                 <a:latin typeface="Microsoft JhengHei" panose="020B0604030504040204" pitchFamily="34" charset="-120"/>
                 <a:ea typeface="Microsoft JhengHei" panose="020B0604030504040204" pitchFamily="34" charset="-120"/>
               </a:rPr>
-              <a:t>我全能阿爸天</a:t>
-            </a:r>
-            <a:r>
-              <a:rPr lang="zh-CN" altLang="en-US" sz="5400" b="1" dirty="0">
+              <a:t>副歌</a:t>
+            </a:r>
+            <a:r>
+              <a:rPr lang="en-US" sz="3733" b="1" dirty="0">
+                <a:solidFill>
+                  <a:srgbClr val="660033"/>
+                </a:solidFill>
                 <a:latin typeface="Microsoft JhengHei" panose="020B0604030504040204" pitchFamily="34" charset="-120"/>
                 <a:ea typeface="Microsoft JhengHei" panose="020B0604030504040204" pitchFamily="34" charset="-120"/>
               </a:rPr>
-              <a:t>父  </a:t>
-            </a:r>
-            <a:r>
-              <a:rPr lang="zh-CN" altLang="en-US" sz="5400" b="1" dirty="0" smtClean="0">
-                <a:latin typeface="Microsoft JhengHei" panose="020B0604030504040204" pitchFamily="34" charset="-120"/>
-                <a:ea typeface="Microsoft JhengHei" panose="020B0604030504040204" pitchFamily="34" charset="-120"/>
-              </a:rPr>
-              <a:t>願</a:t>
-            </a:r>
-            <a:r>
-              <a:rPr lang="zh-CN" altLang="en-US" sz="5400" b="1" dirty="0">
-                <a:latin typeface="Microsoft JhengHei" panose="020B0604030504040204" pitchFamily="34" charset="-120"/>
-                <a:ea typeface="Microsoft JhengHei" panose="020B0604030504040204" pitchFamily="34" charset="-120"/>
-              </a:rPr>
-              <a:t>袮</a:t>
-            </a:r>
-            <a:r>
-              <a:rPr lang="zh-CN" altLang="en-US" sz="5400" b="1" dirty="0" smtClean="0">
-                <a:latin typeface="Microsoft JhengHei" panose="020B0604030504040204" pitchFamily="34" charset="-120"/>
-                <a:ea typeface="Microsoft JhengHei" panose="020B0604030504040204" pitchFamily="34" charset="-120"/>
-              </a:rPr>
-              <a:t>國</a:t>
-            </a:r>
-            <a:r>
-              <a:rPr lang="zh-CN" altLang="en-US" sz="5400" b="1" dirty="0">
-                <a:latin typeface="Microsoft JhengHei" panose="020B0604030504040204" pitchFamily="34" charset="-120"/>
-                <a:ea typeface="Microsoft JhengHei" panose="020B0604030504040204" pitchFamily="34" charset="-120"/>
-              </a:rPr>
-              <a:t>降</a:t>
-            </a:r>
-            <a:r>
-              <a:rPr lang="zh-CN" altLang="en-US" sz="5400" b="1" dirty="0">
-                <a:latin typeface="Microsoft JhengHei" panose="020B0604030504040204" pitchFamily="34" charset="-120"/>
-                <a:ea typeface="Microsoft JhengHei" panose="020B0604030504040204" pitchFamily="34" charset="-120"/>
-              </a:rPr>
-              <a:t>臨</a:t>
-            </a:r>
-            <a:endParaRPr lang="vi-VN" sz="5400" b="1" dirty="0">
-              <a:latin typeface="Microsoft JhengHei" panose="020B0604030504040204" pitchFamily="34" charset="-120"/>
-              <a:ea typeface="Microsoft JhengHei" panose="020B0604030504040204" pitchFamily="34" charset="-120"/>
-            </a:endParaRPr>
-          </a:p>
-          <a:p>
-            <a:pPr marL="0" indent="0" algn="ctr">
-              <a:buNone/>
-            </a:pPr>
-            <a:r>
-              <a:rPr lang="zh-CN" altLang="en-US" sz="5400" b="1" dirty="0">
-                <a:latin typeface="Microsoft JhengHei" panose="020B0604030504040204" pitchFamily="34" charset="-120"/>
-                <a:ea typeface="Microsoft JhengHei" panose="020B0604030504040204" pitchFamily="34" charset="-120"/>
-              </a:rPr>
-              <a:t>願盼望與喜</a:t>
-            </a:r>
-            <a:r>
-              <a:rPr lang="zh-CN" altLang="en-US" sz="5400" b="1" dirty="0">
-                <a:latin typeface="Microsoft JhengHei" panose="020B0604030504040204" pitchFamily="34" charset="-120"/>
-                <a:ea typeface="Microsoft JhengHei" panose="020B0604030504040204" pitchFamily="34" charset="-120"/>
-              </a:rPr>
-              <a:t>樂  永</a:t>
-            </a:r>
-            <a:r>
-              <a:rPr lang="zh-CN" altLang="en-US" sz="5400" b="1" dirty="0">
-                <a:latin typeface="Microsoft JhengHei" panose="020B0604030504040204" pitchFamily="34" charset="-120"/>
-                <a:ea typeface="Microsoft JhengHei" panose="020B0604030504040204" pitchFamily="34" charset="-120"/>
-              </a:rPr>
-              <a:t>遠住我心中</a:t>
-            </a:r>
-            <a:endParaRPr lang="vi-VN" sz="5400" b="1" dirty="0">
-              <a:latin typeface="Microsoft JhengHei" panose="020B0604030504040204" pitchFamily="34" charset="-120"/>
+              <a:t> )</a:t>
+            </a:r>
+            <a:endParaRPr lang="vi-VN" sz="3733" b="1" dirty="0">
+              <a:solidFill>
+                <a:srgbClr val="660033"/>
+              </a:solidFill>
               <a:ea typeface="Microsoft JhengHei" panose="020B0604030504040204" pitchFamily="34" charset="-120"/>
             </a:endParaRPr>
           </a:p>
@@ -3540,7 +3798,7 @@
     </p:spTree>
     <p:extLst>
       <p:ext uri="{BB962C8B-B14F-4D97-AF65-F5344CB8AC3E}">
-        <p14:creationId xmlns:p14="http://schemas.microsoft.com/office/powerpoint/2010/main" val="1172202055"/>
+        <p14:creationId xmlns:p14="http://schemas.microsoft.com/office/powerpoint/2010/main" val="521566952"/>
       </p:ext>
     </p:extLst>
   </p:cSld>
